--- a/Slides/sugestaoslideedc.pptx
+++ b/Slides/sugestaoslideedc.pptx
@@ -3835,6 +3835,899 @@
           </a:p>
         </p:txBody>
       </p:sp>
+      <p:grpSp>
+        <p:nvGrpSpPr>
+          <p:cNvPr id="71" name="Group 70">
+            <a:extLst>
+              <a:ext uri="{FF2B5EF4-FFF2-40B4-BE49-F238E27FC236}">
+                <a16:creationId xmlns:a16="http://schemas.microsoft.com/office/drawing/2014/main" id="{7572C5CD-BF16-FCC3-8F08-C123826BD902}"/>
+              </a:ext>
+            </a:extLst>
+          </p:cNvPr>
+          <p:cNvGrpSpPr>
+            <a:grpSpLocks noChangeAspect="1"/>
+          </p:cNvGrpSpPr>
+          <p:nvPr userDrawn="1"/>
+        </p:nvGrpSpPr>
+        <p:grpSpPr>
+          <a:xfrm flipV="1">
+            <a:off x="10688509" y="1367191"/>
+            <a:ext cx="1381570" cy="134237"/>
+            <a:chOff x="-4160949" y="6086894"/>
+            <a:chExt cx="9276624" cy="809033"/>
+          </a:xfrm>
+        </p:grpSpPr>
+        <p:grpSp>
+          <p:nvGrpSpPr>
+            <p:cNvPr id="72" name="Group 71">
+              <a:extLst>
+                <a:ext uri="{FF2B5EF4-FFF2-40B4-BE49-F238E27FC236}">
+                  <a16:creationId xmlns:a16="http://schemas.microsoft.com/office/drawing/2014/main" id="{859F24AB-5AF5-0D60-CD94-14FC3DD9E155}"/>
+                </a:ext>
+              </a:extLst>
+            </p:cNvPr>
+            <p:cNvGrpSpPr/>
+            <p:nvPr userDrawn="1"/>
+          </p:nvGrpSpPr>
+          <p:grpSpPr>
+            <a:xfrm>
+              <a:off x="0" y="6086894"/>
+              <a:ext cx="5115675" cy="809033"/>
+              <a:chOff x="-1043297" y="6048967"/>
+              <a:chExt cx="5115675" cy="809033"/>
+            </a:xfrm>
+          </p:grpSpPr>
+          <p:grpSp>
+            <p:nvGrpSpPr>
+              <p:cNvPr id="88" name="Group 87">
+                <a:extLst>
+                  <a:ext uri="{FF2B5EF4-FFF2-40B4-BE49-F238E27FC236}">
+                    <a16:creationId xmlns:a16="http://schemas.microsoft.com/office/drawing/2014/main" id="{6E9F47BA-A27F-7CC1-F03A-B62481F7866D}"/>
+                  </a:ext>
+                </a:extLst>
+              </p:cNvPr>
+              <p:cNvGrpSpPr/>
+              <p:nvPr userDrawn="1"/>
+            </p:nvGrpSpPr>
+            <p:grpSpPr>
+              <a:xfrm>
+                <a:off x="1110284" y="6048969"/>
+                <a:ext cx="2962094" cy="809031"/>
+                <a:chOff x="-342429" y="5997958"/>
+                <a:chExt cx="2962094" cy="809031"/>
+              </a:xfrm>
+            </p:grpSpPr>
+            <p:grpSp>
+              <p:nvGrpSpPr>
+                <p:cNvPr id="96" name="Group 95">
+                  <a:extLst>
+                    <a:ext uri="{FF2B5EF4-FFF2-40B4-BE49-F238E27FC236}">
+                      <a16:creationId xmlns:a16="http://schemas.microsoft.com/office/drawing/2014/main" id="{2DCEE4EF-0920-B150-3C60-EA0805509A14}"/>
+                    </a:ext>
+                  </a:extLst>
+                </p:cNvPr>
+                <p:cNvGrpSpPr/>
+                <p:nvPr userDrawn="1"/>
+              </p:nvGrpSpPr>
+              <p:grpSpPr>
+                <a:xfrm>
+                  <a:off x="678729" y="5997959"/>
+                  <a:ext cx="1940936" cy="809030"/>
+                  <a:chOff x="678729" y="5997959"/>
+                  <a:chExt cx="1940936" cy="809030"/>
+                </a:xfrm>
+              </p:grpSpPr>
+              <p:pic>
+                <p:nvPicPr>
+                  <p:cNvPr id="100" name="Graphic 99">
+                    <a:extLst>
+                      <a:ext uri="{FF2B5EF4-FFF2-40B4-BE49-F238E27FC236}">
+                        <a16:creationId xmlns:a16="http://schemas.microsoft.com/office/drawing/2014/main" id="{BCDCDC48-F75F-B08B-5BB6-C27516462465}"/>
+                      </a:ext>
+                    </a:extLst>
+                  </p:cNvPr>
+                  <p:cNvPicPr>
+                    <a:picLocks noChangeAspect="1"/>
+                  </p:cNvPicPr>
+                  <p:nvPr userDrawn="1"/>
+                </p:nvPicPr>
+                <p:blipFill>
+                  <a:blip>
+                    <a:extLst>
+                      <a:ext uri="{96DAC541-7B7A-43D3-8B79-37D633B846F1}">
+                        <asvg:svgBlip xmlns:asvg="http://schemas.microsoft.com/office/drawing/2016/SVG/main" r:embed="rId2"/>
+                      </a:ext>
+                    </a:extLst>
+                  </a:blip>
+                  <a:stretch>
+                    <a:fillRect/>
+                  </a:stretch>
+                </p:blipFill>
+                <p:spPr>
+                  <a:xfrm>
+                    <a:off x="1217929" y="5997959"/>
+                    <a:ext cx="1401736" cy="809029"/>
+                  </a:xfrm>
+                  <a:prstGeom prst="rect">
+                    <a:avLst/>
+                  </a:prstGeom>
+                </p:spPr>
+              </p:pic>
+              <p:pic>
+                <p:nvPicPr>
+                  <p:cNvPr id="101" name="Graphic 100">
+                    <a:extLst>
+                      <a:ext uri="{FF2B5EF4-FFF2-40B4-BE49-F238E27FC236}">
+                        <a16:creationId xmlns:a16="http://schemas.microsoft.com/office/drawing/2014/main" id="{2E16DA29-18D4-A5C2-C525-424A548628FB}"/>
+                      </a:ext>
+                    </a:extLst>
+                  </p:cNvPr>
+                  <p:cNvPicPr>
+                    <a:picLocks noChangeAspect="1"/>
+                  </p:cNvPicPr>
+                  <p:nvPr userDrawn="1"/>
+                </p:nvPicPr>
+                <p:blipFill>
+                  <a:blip>
+                    <a:extLst>
+                      <a:ext uri="{96DAC541-7B7A-43D3-8B79-37D633B846F1}">
+                        <asvg:svgBlip xmlns:asvg="http://schemas.microsoft.com/office/drawing/2016/SVG/main" r:embed="rId3"/>
+                      </a:ext>
+                    </a:extLst>
+                  </a:blip>
+                  <a:stretch>
+                    <a:fillRect/>
+                  </a:stretch>
+                </p:blipFill>
+                <p:spPr>
+                  <a:xfrm>
+                    <a:off x="678729" y="5997960"/>
+                    <a:ext cx="1401736" cy="809029"/>
+                  </a:xfrm>
+                  <a:prstGeom prst="rect">
+                    <a:avLst/>
+                  </a:prstGeom>
+                </p:spPr>
+              </p:pic>
+            </p:grpSp>
+            <p:grpSp>
+              <p:nvGrpSpPr>
+                <p:cNvPr id="97" name="Group 96">
+                  <a:extLst>
+                    <a:ext uri="{FF2B5EF4-FFF2-40B4-BE49-F238E27FC236}">
+                      <a16:creationId xmlns:a16="http://schemas.microsoft.com/office/drawing/2014/main" id="{F492C701-96A9-AFD9-05F6-54AEE97C644C}"/>
+                    </a:ext>
+                  </a:extLst>
+                </p:cNvPr>
+                <p:cNvGrpSpPr/>
+                <p:nvPr userDrawn="1"/>
+              </p:nvGrpSpPr>
+              <p:grpSpPr>
+                <a:xfrm>
+                  <a:off x="-342429" y="5997958"/>
+                  <a:ext cx="1940936" cy="809030"/>
+                  <a:chOff x="678729" y="5997959"/>
+                  <a:chExt cx="1940936" cy="809030"/>
+                </a:xfrm>
+              </p:grpSpPr>
+              <p:pic>
+                <p:nvPicPr>
+                  <p:cNvPr id="98" name="Graphic 97">
+                    <a:extLst>
+                      <a:ext uri="{FF2B5EF4-FFF2-40B4-BE49-F238E27FC236}">
+                        <a16:creationId xmlns:a16="http://schemas.microsoft.com/office/drawing/2014/main" id="{8C7894BD-A307-A1D7-5DFD-D4C39E991137}"/>
+                      </a:ext>
+                    </a:extLst>
+                  </p:cNvPr>
+                  <p:cNvPicPr>
+                    <a:picLocks noChangeAspect="1"/>
+                  </p:cNvPicPr>
+                  <p:nvPr userDrawn="1"/>
+                </p:nvPicPr>
+                <p:blipFill>
+                  <a:blip>
+                    <a:extLst>
+                      <a:ext uri="{96DAC541-7B7A-43D3-8B79-37D633B846F1}">
+                        <asvg:svgBlip xmlns:asvg="http://schemas.microsoft.com/office/drawing/2016/SVG/main" r:embed="rId2"/>
+                      </a:ext>
+                    </a:extLst>
+                  </a:blip>
+                  <a:stretch>
+                    <a:fillRect/>
+                  </a:stretch>
+                </p:blipFill>
+                <p:spPr>
+                  <a:xfrm>
+                    <a:off x="1217929" y="5997959"/>
+                    <a:ext cx="1401736" cy="809029"/>
+                  </a:xfrm>
+                  <a:prstGeom prst="rect">
+                    <a:avLst/>
+                  </a:prstGeom>
+                </p:spPr>
+              </p:pic>
+              <p:pic>
+                <p:nvPicPr>
+                  <p:cNvPr id="99" name="Graphic 98">
+                    <a:extLst>
+                      <a:ext uri="{FF2B5EF4-FFF2-40B4-BE49-F238E27FC236}">
+                        <a16:creationId xmlns:a16="http://schemas.microsoft.com/office/drawing/2014/main" id="{CB5842DD-EEF9-F237-5D40-B39F43C16124}"/>
+                      </a:ext>
+                    </a:extLst>
+                  </p:cNvPr>
+                  <p:cNvPicPr>
+                    <a:picLocks noChangeAspect="1"/>
+                  </p:cNvPicPr>
+                  <p:nvPr userDrawn="1"/>
+                </p:nvPicPr>
+                <p:blipFill>
+                  <a:blip>
+                    <a:extLst>
+                      <a:ext uri="{96DAC541-7B7A-43D3-8B79-37D633B846F1}">
+                        <asvg:svgBlip xmlns:asvg="http://schemas.microsoft.com/office/drawing/2016/SVG/main" r:embed="rId3"/>
+                      </a:ext>
+                    </a:extLst>
+                  </a:blip>
+                  <a:stretch>
+                    <a:fillRect/>
+                  </a:stretch>
+                </p:blipFill>
+                <p:spPr>
+                  <a:xfrm>
+                    <a:off x="678729" y="5997960"/>
+                    <a:ext cx="1401736" cy="809029"/>
+                  </a:xfrm>
+                  <a:prstGeom prst="rect">
+                    <a:avLst/>
+                  </a:prstGeom>
+                </p:spPr>
+              </p:pic>
+            </p:grpSp>
+          </p:grpSp>
+          <p:grpSp>
+            <p:nvGrpSpPr>
+              <p:cNvPr id="89" name="Group 88">
+                <a:extLst>
+                  <a:ext uri="{FF2B5EF4-FFF2-40B4-BE49-F238E27FC236}">
+                    <a16:creationId xmlns:a16="http://schemas.microsoft.com/office/drawing/2014/main" id="{3A8F0070-9671-A6D0-13EA-13B0B7F3D2EA}"/>
+                  </a:ext>
+                </a:extLst>
+              </p:cNvPr>
+              <p:cNvGrpSpPr/>
+              <p:nvPr userDrawn="1"/>
+            </p:nvGrpSpPr>
+            <p:grpSpPr>
+              <a:xfrm>
+                <a:off x="-1043297" y="6048967"/>
+                <a:ext cx="2962094" cy="809031"/>
+                <a:chOff x="-342429" y="5997958"/>
+                <a:chExt cx="2962094" cy="809031"/>
+              </a:xfrm>
+            </p:grpSpPr>
+            <p:grpSp>
+              <p:nvGrpSpPr>
+                <p:cNvPr id="90" name="Group 89">
+                  <a:extLst>
+                    <a:ext uri="{FF2B5EF4-FFF2-40B4-BE49-F238E27FC236}">
+                      <a16:creationId xmlns:a16="http://schemas.microsoft.com/office/drawing/2014/main" id="{D9EA1507-9A34-EF55-762A-C2E5389227E6}"/>
+                    </a:ext>
+                  </a:extLst>
+                </p:cNvPr>
+                <p:cNvGrpSpPr/>
+                <p:nvPr userDrawn="1"/>
+              </p:nvGrpSpPr>
+              <p:grpSpPr>
+                <a:xfrm>
+                  <a:off x="678729" y="5997959"/>
+                  <a:ext cx="1940936" cy="809030"/>
+                  <a:chOff x="678729" y="5997959"/>
+                  <a:chExt cx="1940936" cy="809030"/>
+                </a:xfrm>
+              </p:grpSpPr>
+              <p:pic>
+                <p:nvPicPr>
+                  <p:cNvPr id="94" name="Graphic 93">
+                    <a:extLst>
+                      <a:ext uri="{FF2B5EF4-FFF2-40B4-BE49-F238E27FC236}">
+                        <a16:creationId xmlns:a16="http://schemas.microsoft.com/office/drawing/2014/main" id="{976D5F5F-C1DA-5E76-CDC4-88604791A11A}"/>
+                      </a:ext>
+                    </a:extLst>
+                  </p:cNvPr>
+                  <p:cNvPicPr>
+                    <a:picLocks noChangeAspect="1"/>
+                  </p:cNvPicPr>
+                  <p:nvPr userDrawn="1"/>
+                </p:nvPicPr>
+                <p:blipFill>
+                  <a:blip>
+                    <a:extLst>
+                      <a:ext uri="{96DAC541-7B7A-43D3-8B79-37D633B846F1}">
+                        <asvg:svgBlip xmlns:asvg="http://schemas.microsoft.com/office/drawing/2016/SVG/main" r:embed="rId2"/>
+                      </a:ext>
+                    </a:extLst>
+                  </a:blip>
+                  <a:stretch>
+                    <a:fillRect/>
+                  </a:stretch>
+                </p:blipFill>
+                <p:spPr>
+                  <a:xfrm>
+                    <a:off x="1217929" y="5997959"/>
+                    <a:ext cx="1401736" cy="809029"/>
+                  </a:xfrm>
+                  <a:prstGeom prst="rect">
+                    <a:avLst/>
+                  </a:prstGeom>
+                </p:spPr>
+              </p:pic>
+              <p:pic>
+                <p:nvPicPr>
+                  <p:cNvPr id="95" name="Graphic 94">
+                    <a:extLst>
+                      <a:ext uri="{FF2B5EF4-FFF2-40B4-BE49-F238E27FC236}">
+                        <a16:creationId xmlns:a16="http://schemas.microsoft.com/office/drawing/2014/main" id="{E82C2E25-4B0F-E1D8-CEF8-1BBCFB24C142}"/>
+                      </a:ext>
+                    </a:extLst>
+                  </p:cNvPr>
+                  <p:cNvPicPr>
+                    <a:picLocks noChangeAspect="1"/>
+                  </p:cNvPicPr>
+                  <p:nvPr userDrawn="1"/>
+                </p:nvPicPr>
+                <p:blipFill>
+                  <a:blip>
+                    <a:extLst>
+                      <a:ext uri="{96DAC541-7B7A-43D3-8B79-37D633B846F1}">
+                        <asvg:svgBlip xmlns:asvg="http://schemas.microsoft.com/office/drawing/2016/SVG/main" r:embed="rId3"/>
+                      </a:ext>
+                    </a:extLst>
+                  </a:blip>
+                  <a:stretch>
+                    <a:fillRect/>
+                  </a:stretch>
+                </p:blipFill>
+                <p:spPr>
+                  <a:xfrm>
+                    <a:off x="678729" y="5997960"/>
+                    <a:ext cx="1401736" cy="809029"/>
+                  </a:xfrm>
+                  <a:prstGeom prst="rect">
+                    <a:avLst/>
+                  </a:prstGeom>
+                </p:spPr>
+              </p:pic>
+            </p:grpSp>
+            <p:grpSp>
+              <p:nvGrpSpPr>
+                <p:cNvPr id="91" name="Group 90">
+                  <a:extLst>
+                    <a:ext uri="{FF2B5EF4-FFF2-40B4-BE49-F238E27FC236}">
+                      <a16:creationId xmlns:a16="http://schemas.microsoft.com/office/drawing/2014/main" id="{3C4D8B4D-A4A6-EE74-05AD-32D187FBE35D}"/>
+                    </a:ext>
+                  </a:extLst>
+                </p:cNvPr>
+                <p:cNvGrpSpPr/>
+                <p:nvPr userDrawn="1"/>
+              </p:nvGrpSpPr>
+              <p:grpSpPr>
+                <a:xfrm>
+                  <a:off x="-342429" y="5997958"/>
+                  <a:ext cx="1940936" cy="809030"/>
+                  <a:chOff x="678729" y="5997959"/>
+                  <a:chExt cx="1940936" cy="809030"/>
+                </a:xfrm>
+              </p:grpSpPr>
+              <p:pic>
+                <p:nvPicPr>
+                  <p:cNvPr id="92" name="Graphic 91">
+                    <a:extLst>
+                      <a:ext uri="{FF2B5EF4-FFF2-40B4-BE49-F238E27FC236}">
+                        <a16:creationId xmlns:a16="http://schemas.microsoft.com/office/drawing/2014/main" id="{6B9A9D59-A64D-4516-6F76-ECA57E3AC5BE}"/>
+                      </a:ext>
+                    </a:extLst>
+                  </p:cNvPr>
+                  <p:cNvPicPr>
+                    <a:picLocks noChangeAspect="1"/>
+                  </p:cNvPicPr>
+                  <p:nvPr userDrawn="1"/>
+                </p:nvPicPr>
+                <p:blipFill>
+                  <a:blip>
+                    <a:extLst>
+                      <a:ext uri="{96DAC541-7B7A-43D3-8B79-37D633B846F1}">
+                        <asvg:svgBlip xmlns:asvg="http://schemas.microsoft.com/office/drawing/2016/SVG/main" r:embed="rId2"/>
+                      </a:ext>
+                    </a:extLst>
+                  </a:blip>
+                  <a:stretch>
+                    <a:fillRect/>
+                  </a:stretch>
+                </p:blipFill>
+                <p:spPr>
+                  <a:xfrm>
+                    <a:off x="1217929" y="5997959"/>
+                    <a:ext cx="1401736" cy="809029"/>
+                  </a:xfrm>
+                  <a:prstGeom prst="rect">
+                    <a:avLst/>
+                  </a:prstGeom>
+                </p:spPr>
+              </p:pic>
+              <p:pic>
+                <p:nvPicPr>
+                  <p:cNvPr id="93" name="Graphic 92">
+                    <a:extLst>
+                      <a:ext uri="{FF2B5EF4-FFF2-40B4-BE49-F238E27FC236}">
+                        <a16:creationId xmlns:a16="http://schemas.microsoft.com/office/drawing/2014/main" id="{FD777E7F-F0C9-0593-278C-66E78399F7CA}"/>
+                      </a:ext>
+                    </a:extLst>
+                  </p:cNvPr>
+                  <p:cNvPicPr>
+                    <a:picLocks noChangeAspect="1"/>
+                  </p:cNvPicPr>
+                  <p:nvPr userDrawn="1"/>
+                </p:nvPicPr>
+                <p:blipFill>
+                  <a:blip>
+                    <a:extLst>
+                      <a:ext uri="{96DAC541-7B7A-43D3-8B79-37D633B846F1}">
+                        <asvg:svgBlip xmlns:asvg="http://schemas.microsoft.com/office/drawing/2016/SVG/main" r:embed="rId3"/>
+                      </a:ext>
+                    </a:extLst>
+                  </a:blip>
+                  <a:stretch>
+                    <a:fillRect/>
+                  </a:stretch>
+                </p:blipFill>
+                <p:spPr>
+                  <a:xfrm>
+                    <a:off x="678729" y="5997960"/>
+                    <a:ext cx="1401736" cy="809029"/>
+                  </a:xfrm>
+                  <a:prstGeom prst="rect">
+                    <a:avLst/>
+                  </a:prstGeom>
+                </p:spPr>
+              </p:pic>
+            </p:grpSp>
+          </p:grpSp>
+        </p:grpSp>
+        <p:grpSp>
+          <p:nvGrpSpPr>
+            <p:cNvPr id="73" name="Group 72">
+              <a:extLst>
+                <a:ext uri="{FF2B5EF4-FFF2-40B4-BE49-F238E27FC236}">
+                  <a16:creationId xmlns:a16="http://schemas.microsoft.com/office/drawing/2014/main" id="{085E8E5F-3FFF-EC31-2E46-B96B1C64B60E}"/>
+                </a:ext>
+              </a:extLst>
+            </p:cNvPr>
+            <p:cNvGrpSpPr/>
+            <p:nvPr userDrawn="1"/>
+          </p:nvGrpSpPr>
+          <p:grpSpPr>
+            <a:xfrm>
+              <a:off x="-4160949" y="6086894"/>
+              <a:ext cx="5115675" cy="809033"/>
+              <a:chOff x="-1043297" y="6048967"/>
+              <a:chExt cx="5115675" cy="809033"/>
+            </a:xfrm>
+          </p:grpSpPr>
+          <p:grpSp>
+            <p:nvGrpSpPr>
+              <p:cNvPr id="74" name="Group 73">
+                <a:extLst>
+                  <a:ext uri="{FF2B5EF4-FFF2-40B4-BE49-F238E27FC236}">
+                    <a16:creationId xmlns:a16="http://schemas.microsoft.com/office/drawing/2014/main" id="{BCE26051-F60A-AFCF-D8D5-C489AC88DC58}"/>
+                  </a:ext>
+                </a:extLst>
+              </p:cNvPr>
+              <p:cNvGrpSpPr/>
+              <p:nvPr userDrawn="1"/>
+            </p:nvGrpSpPr>
+            <p:grpSpPr>
+              <a:xfrm>
+                <a:off x="1110284" y="6048969"/>
+                <a:ext cx="2962094" cy="809031"/>
+                <a:chOff x="-342429" y="5997958"/>
+                <a:chExt cx="2962094" cy="809031"/>
+              </a:xfrm>
+            </p:grpSpPr>
+            <p:grpSp>
+              <p:nvGrpSpPr>
+                <p:cNvPr id="82" name="Group 81">
+                  <a:extLst>
+                    <a:ext uri="{FF2B5EF4-FFF2-40B4-BE49-F238E27FC236}">
+                      <a16:creationId xmlns:a16="http://schemas.microsoft.com/office/drawing/2014/main" id="{AFC2A042-05CD-FDD0-A4BC-24E5F7DDE55E}"/>
+                    </a:ext>
+                  </a:extLst>
+                </p:cNvPr>
+                <p:cNvGrpSpPr/>
+                <p:nvPr userDrawn="1"/>
+              </p:nvGrpSpPr>
+              <p:grpSpPr>
+                <a:xfrm>
+                  <a:off x="678729" y="5997959"/>
+                  <a:ext cx="1940936" cy="809030"/>
+                  <a:chOff x="678729" y="5997959"/>
+                  <a:chExt cx="1940936" cy="809030"/>
+                </a:xfrm>
+              </p:grpSpPr>
+              <p:pic>
+                <p:nvPicPr>
+                  <p:cNvPr id="86" name="Graphic 85">
+                    <a:extLst>
+                      <a:ext uri="{FF2B5EF4-FFF2-40B4-BE49-F238E27FC236}">
+                        <a16:creationId xmlns:a16="http://schemas.microsoft.com/office/drawing/2014/main" id="{9703A62E-1328-5BF0-63E1-5365A0A9D1FA}"/>
+                      </a:ext>
+                    </a:extLst>
+                  </p:cNvPr>
+                  <p:cNvPicPr>
+                    <a:picLocks noChangeAspect="1"/>
+                  </p:cNvPicPr>
+                  <p:nvPr userDrawn="1"/>
+                </p:nvPicPr>
+                <p:blipFill>
+                  <a:blip>
+                    <a:extLst>
+                      <a:ext uri="{96DAC541-7B7A-43D3-8B79-37D633B846F1}">
+                        <asvg:svgBlip xmlns:asvg="http://schemas.microsoft.com/office/drawing/2016/SVG/main" r:embed="rId2"/>
+                      </a:ext>
+                    </a:extLst>
+                  </a:blip>
+                  <a:stretch>
+                    <a:fillRect/>
+                  </a:stretch>
+                </p:blipFill>
+                <p:spPr>
+                  <a:xfrm>
+                    <a:off x="1217929" y="5997959"/>
+                    <a:ext cx="1401736" cy="809029"/>
+                  </a:xfrm>
+                  <a:prstGeom prst="rect">
+                    <a:avLst/>
+                  </a:prstGeom>
+                </p:spPr>
+              </p:pic>
+              <p:pic>
+                <p:nvPicPr>
+                  <p:cNvPr id="87" name="Graphic 86">
+                    <a:extLst>
+                      <a:ext uri="{FF2B5EF4-FFF2-40B4-BE49-F238E27FC236}">
+                        <a16:creationId xmlns:a16="http://schemas.microsoft.com/office/drawing/2014/main" id="{144665C0-C2EA-817D-E10E-798D125B61D2}"/>
+                      </a:ext>
+                    </a:extLst>
+                  </p:cNvPr>
+                  <p:cNvPicPr>
+                    <a:picLocks noChangeAspect="1"/>
+                  </p:cNvPicPr>
+                  <p:nvPr userDrawn="1"/>
+                </p:nvPicPr>
+                <p:blipFill>
+                  <a:blip>
+                    <a:extLst>
+                      <a:ext uri="{96DAC541-7B7A-43D3-8B79-37D633B846F1}">
+                        <asvg:svgBlip xmlns:asvg="http://schemas.microsoft.com/office/drawing/2016/SVG/main" r:embed="rId3"/>
+                      </a:ext>
+                    </a:extLst>
+                  </a:blip>
+                  <a:stretch>
+                    <a:fillRect/>
+                  </a:stretch>
+                </p:blipFill>
+                <p:spPr>
+                  <a:xfrm>
+                    <a:off x="678729" y="5997960"/>
+                    <a:ext cx="1401736" cy="809029"/>
+                  </a:xfrm>
+                  <a:prstGeom prst="rect">
+                    <a:avLst/>
+                  </a:prstGeom>
+                </p:spPr>
+              </p:pic>
+            </p:grpSp>
+            <p:grpSp>
+              <p:nvGrpSpPr>
+                <p:cNvPr id="83" name="Group 82">
+                  <a:extLst>
+                    <a:ext uri="{FF2B5EF4-FFF2-40B4-BE49-F238E27FC236}">
+                      <a16:creationId xmlns:a16="http://schemas.microsoft.com/office/drawing/2014/main" id="{FB70CA7F-C378-F2D9-1391-D24DF3E618EE}"/>
+                    </a:ext>
+                  </a:extLst>
+                </p:cNvPr>
+                <p:cNvGrpSpPr/>
+                <p:nvPr userDrawn="1"/>
+              </p:nvGrpSpPr>
+              <p:grpSpPr>
+                <a:xfrm>
+                  <a:off x="-342429" y="5997958"/>
+                  <a:ext cx="1940936" cy="809030"/>
+                  <a:chOff x="678729" y="5997959"/>
+                  <a:chExt cx="1940936" cy="809030"/>
+                </a:xfrm>
+              </p:grpSpPr>
+              <p:pic>
+                <p:nvPicPr>
+                  <p:cNvPr id="84" name="Graphic 83">
+                    <a:extLst>
+                      <a:ext uri="{FF2B5EF4-FFF2-40B4-BE49-F238E27FC236}">
+                        <a16:creationId xmlns:a16="http://schemas.microsoft.com/office/drawing/2014/main" id="{9A9CE453-A36B-49D2-9897-A7DCF2CE08BC}"/>
+                      </a:ext>
+                    </a:extLst>
+                  </p:cNvPr>
+                  <p:cNvPicPr>
+                    <a:picLocks noChangeAspect="1"/>
+                  </p:cNvPicPr>
+                  <p:nvPr userDrawn="1"/>
+                </p:nvPicPr>
+                <p:blipFill>
+                  <a:blip>
+                    <a:extLst>
+                      <a:ext uri="{96DAC541-7B7A-43D3-8B79-37D633B846F1}">
+                        <asvg:svgBlip xmlns:asvg="http://schemas.microsoft.com/office/drawing/2016/SVG/main" r:embed="rId2"/>
+                      </a:ext>
+                    </a:extLst>
+                  </a:blip>
+                  <a:stretch>
+                    <a:fillRect/>
+                  </a:stretch>
+                </p:blipFill>
+                <p:spPr>
+                  <a:xfrm>
+                    <a:off x="1217929" y="5997959"/>
+                    <a:ext cx="1401736" cy="809029"/>
+                  </a:xfrm>
+                  <a:prstGeom prst="rect">
+                    <a:avLst/>
+                  </a:prstGeom>
+                </p:spPr>
+              </p:pic>
+              <p:pic>
+                <p:nvPicPr>
+                  <p:cNvPr id="85" name="Graphic 84">
+                    <a:extLst>
+                      <a:ext uri="{FF2B5EF4-FFF2-40B4-BE49-F238E27FC236}">
+                        <a16:creationId xmlns:a16="http://schemas.microsoft.com/office/drawing/2014/main" id="{7F559D14-4CED-219B-B857-5C7598263EF4}"/>
+                      </a:ext>
+                    </a:extLst>
+                  </p:cNvPr>
+                  <p:cNvPicPr>
+                    <a:picLocks noChangeAspect="1"/>
+                  </p:cNvPicPr>
+                  <p:nvPr userDrawn="1"/>
+                </p:nvPicPr>
+                <p:blipFill>
+                  <a:blip>
+                    <a:extLst>
+                      <a:ext uri="{96DAC541-7B7A-43D3-8B79-37D633B846F1}">
+                        <asvg:svgBlip xmlns:asvg="http://schemas.microsoft.com/office/drawing/2016/SVG/main" r:embed="rId3"/>
+                      </a:ext>
+                    </a:extLst>
+                  </a:blip>
+                  <a:stretch>
+                    <a:fillRect/>
+                  </a:stretch>
+                </p:blipFill>
+                <p:spPr>
+                  <a:xfrm>
+                    <a:off x="678729" y="5997960"/>
+                    <a:ext cx="1401736" cy="809029"/>
+                  </a:xfrm>
+                  <a:prstGeom prst="rect">
+                    <a:avLst/>
+                  </a:prstGeom>
+                </p:spPr>
+              </p:pic>
+            </p:grpSp>
+          </p:grpSp>
+          <p:grpSp>
+            <p:nvGrpSpPr>
+              <p:cNvPr id="75" name="Group 74">
+                <a:extLst>
+                  <a:ext uri="{FF2B5EF4-FFF2-40B4-BE49-F238E27FC236}">
+                    <a16:creationId xmlns:a16="http://schemas.microsoft.com/office/drawing/2014/main" id="{113E9D6B-9FD6-0D6D-A7E6-EEE9A190F5BB}"/>
+                  </a:ext>
+                </a:extLst>
+              </p:cNvPr>
+              <p:cNvGrpSpPr/>
+              <p:nvPr userDrawn="1"/>
+            </p:nvGrpSpPr>
+            <p:grpSpPr>
+              <a:xfrm>
+                <a:off x="-1043297" y="6048967"/>
+                <a:ext cx="2962094" cy="809031"/>
+                <a:chOff x="-342429" y="5997958"/>
+                <a:chExt cx="2962094" cy="809031"/>
+              </a:xfrm>
+            </p:grpSpPr>
+            <p:grpSp>
+              <p:nvGrpSpPr>
+                <p:cNvPr id="76" name="Group 75">
+                  <a:extLst>
+                    <a:ext uri="{FF2B5EF4-FFF2-40B4-BE49-F238E27FC236}">
+                      <a16:creationId xmlns:a16="http://schemas.microsoft.com/office/drawing/2014/main" id="{FB37EBA6-8917-48DA-1C32-3835004C8507}"/>
+                    </a:ext>
+                  </a:extLst>
+                </p:cNvPr>
+                <p:cNvGrpSpPr/>
+                <p:nvPr userDrawn="1"/>
+              </p:nvGrpSpPr>
+              <p:grpSpPr>
+                <a:xfrm>
+                  <a:off x="678729" y="5997959"/>
+                  <a:ext cx="1940936" cy="809030"/>
+                  <a:chOff x="678729" y="5997959"/>
+                  <a:chExt cx="1940936" cy="809030"/>
+                </a:xfrm>
+              </p:grpSpPr>
+              <p:pic>
+                <p:nvPicPr>
+                  <p:cNvPr id="80" name="Graphic 79">
+                    <a:extLst>
+                      <a:ext uri="{FF2B5EF4-FFF2-40B4-BE49-F238E27FC236}">
+                        <a16:creationId xmlns:a16="http://schemas.microsoft.com/office/drawing/2014/main" id="{88D41AA7-720D-D9AF-44B3-4067B391B020}"/>
+                      </a:ext>
+                    </a:extLst>
+                  </p:cNvPr>
+                  <p:cNvPicPr>
+                    <a:picLocks noChangeAspect="1"/>
+                  </p:cNvPicPr>
+                  <p:nvPr userDrawn="1"/>
+                </p:nvPicPr>
+                <p:blipFill>
+                  <a:blip>
+                    <a:extLst>
+                      <a:ext uri="{96DAC541-7B7A-43D3-8B79-37D633B846F1}">
+                        <asvg:svgBlip xmlns:asvg="http://schemas.microsoft.com/office/drawing/2016/SVG/main" r:embed="rId2"/>
+                      </a:ext>
+                    </a:extLst>
+                  </a:blip>
+                  <a:stretch>
+                    <a:fillRect/>
+                  </a:stretch>
+                </p:blipFill>
+                <p:spPr>
+                  <a:xfrm>
+                    <a:off x="1217929" y="5997959"/>
+                    <a:ext cx="1401736" cy="809029"/>
+                  </a:xfrm>
+                  <a:prstGeom prst="rect">
+                    <a:avLst/>
+                  </a:prstGeom>
+                </p:spPr>
+              </p:pic>
+              <p:pic>
+                <p:nvPicPr>
+                  <p:cNvPr id="81" name="Graphic 80">
+                    <a:extLst>
+                      <a:ext uri="{FF2B5EF4-FFF2-40B4-BE49-F238E27FC236}">
+                        <a16:creationId xmlns:a16="http://schemas.microsoft.com/office/drawing/2014/main" id="{7E1610CC-469F-E0BD-3BF2-8409810A02A0}"/>
+                      </a:ext>
+                    </a:extLst>
+                  </p:cNvPr>
+                  <p:cNvPicPr>
+                    <a:picLocks noChangeAspect="1"/>
+                  </p:cNvPicPr>
+                  <p:nvPr userDrawn="1"/>
+                </p:nvPicPr>
+                <p:blipFill>
+                  <a:blip>
+                    <a:extLst>
+                      <a:ext uri="{96DAC541-7B7A-43D3-8B79-37D633B846F1}">
+                        <asvg:svgBlip xmlns:asvg="http://schemas.microsoft.com/office/drawing/2016/SVG/main" r:embed="rId3"/>
+                      </a:ext>
+                    </a:extLst>
+                  </a:blip>
+                  <a:stretch>
+                    <a:fillRect/>
+                  </a:stretch>
+                </p:blipFill>
+                <p:spPr>
+                  <a:xfrm>
+                    <a:off x="678729" y="5997960"/>
+                    <a:ext cx="1401736" cy="809029"/>
+                  </a:xfrm>
+                  <a:prstGeom prst="rect">
+                    <a:avLst/>
+                  </a:prstGeom>
+                </p:spPr>
+              </p:pic>
+            </p:grpSp>
+            <p:grpSp>
+              <p:nvGrpSpPr>
+                <p:cNvPr id="77" name="Group 76">
+                  <a:extLst>
+                    <a:ext uri="{FF2B5EF4-FFF2-40B4-BE49-F238E27FC236}">
+                      <a16:creationId xmlns:a16="http://schemas.microsoft.com/office/drawing/2014/main" id="{39783368-A9AB-EC51-59A9-82AD397F440B}"/>
+                    </a:ext>
+                  </a:extLst>
+                </p:cNvPr>
+                <p:cNvGrpSpPr/>
+                <p:nvPr userDrawn="1"/>
+              </p:nvGrpSpPr>
+              <p:grpSpPr>
+                <a:xfrm>
+                  <a:off x="-342429" y="5997958"/>
+                  <a:ext cx="1940936" cy="809030"/>
+                  <a:chOff x="678729" y="5997959"/>
+                  <a:chExt cx="1940936" cy="809030"/>
+                </a:xfrm>
+              </p:grpSpPr>
+              <p:pic>
+                <p:nvPicPr>
+                  <p:cNvPr id="78" name="Graphic 77">
+                    <a:extLst>
+                      <a:ext uri="{FF2B5EF4-FFF2-40B4-BE49-F238E27FC236}">
+                        <a16:creationId xmlns:a16="http://schemas.microsoft.com/office/drawing/2014/main" id="{F3C665E2-A3E2-3F0A-2E46-B4E67B93EA7E}"/>
+                      </a:ext>
+                    </a:extLst>
+                  </p:cNvPr>
+                  <p:cNvPicPr>
+                    <a:picLocks noChangeAspect="1"/>
+                  </p:cNvPicPr>
+                  <p:nvPr userDrawn="1"/>
+                </p:nvPicPr>
+                <p:blipFill>
+                  <a:blip>
+                    <a:extLst>
+                      <a:ext uri="{96DAC541-7B7A-43D3-8B79-37D633B846F1}">
+                        <asvg:svgBlip xmlns:asvg="http://schemas.microsoft.com/office/drawing/2016/SVG/main" r:embed="rId2"/>
+                      </a:ext>
+                    </a:extLst>
+                  </a:blip>
+                  <a:stretch>
+                    <a:fillRect/>
+                  </a:stretch>
+                </p:blipFill>
+                <p:spPr>
+                  <a:xfrm>
+                    <a:off x="1217929" y="5997959"/>
+                    <a:ext cx="1401736" cy="809029"/>
+                  </a:xfrm>
+                  <a:prstGeom prst="rect">
+                    <a:avLst/>
+                  </a:prstGeom>
+                </p:spPr>
+              </p:pic>
+              <p:pic>
+                <p:nvPicPr>
+                  <p:cNvPr id="79" name="Graphic 78">
+                    <a:extLst>
+                      <a:ext uri="{FF2B5EF4-FFF2-40B4-BE49-F238E27FC236}">
+                        <a16:creationId xmlns:a16="http://schemas.microsoft.com/office/drawing/2014/main" id="{30459D02-311E-EF5A-3FCA-9831094C588C}"/>
+                      </a:ext>
+                    </a:extLst>
+                  </p:cNvPr>
+                  <p:cNvPicPr>
+                    <a:picLocks noChangeAspect="1"/>
+                  </p:cNvPicPr>
+                  <p:nvPr userDrawn="1"/>
+                </p:nvPicPr>
+                <p:blipFill>
+                  <a:blip>
+                    <a:extLst>
+                      <a:ext uri="{96DAC541-7B7A-43D3-8B79-37D633B846F1}">
+                        <asvg:svgBlip xmlns:asvg="http://schemas.microsoft.com/office/drawing/2016/SVG/main" r:embed="rId3"/>
+                      </a:ext>
+                    </a:extLst>
+                  </a:blip>
+                  <a:stretch>
+                    <a:fillRect/>
+                  </a:stretch>
+                </p:blipFill>
+                <p:spPr>
+                  <a:xfrm>
+                    <a:off x="678729" y="5997960"/>
+                    <a:ext cx="1401736" cy="809029"/>
+                  </a:xfrm>
+                  <a:prstGeom prst="rect">
+                    <a:avLst/>
+                  </a:prstGeom>
+                </p:spPr>
+              </p:pic>
+            </p:grpSp>
+          </p:grpSp>
+        </p:grpSp>
+      </p:grpSp>
     </p:spTree>
     <p:extLst>
       <p:ext uri="{BB962C8B-B14F-4D97-AF65-F5344CB8AC3E}">
@@ -4150,8 +5043,8 @@
           <p:nvPr userDrawn="1"/>
         </p:nvGrpSpPr>
         <p:grpSpPr>
-          <a:xfrm rot="5400000">
-            <a:off x="9439789" y="3098307"/>
+          <a:xfrm>
+            <a:off x="7530007" y="1123416"/>
             <a:ext cx="4661993" cy="452972"/>
             <a:chOff x="-4160949" y="6086894"/>
             <a:chExt cx="9276624" cy="809033"/>
@@ -7655,6 +8548,899 @@
           </a:prstGeom>
         </p:spPr>
       </p:pic>
+      <p:grpSp>
+        <p:nvGrpSpPr>
+          <p:cNvPr id="9" name="Group 8">
+            <a:extLst>
+              <a:ext uri="{FF2B5EF4-FFF2-40B4-BE49-F238E27FC236}">
+                <a16:creationId xmlns:a16="http://schemas.microsoft.com/office/drawing/2014/main" id="{8550A4F9-7114-E576-6958-19090247C875}"/>
+              </a:ext>
+            </a:extLst>
+          </p:cNvPr>
+          <p:cNvGrpSpPr>
+            <a:grpSpLocks noChangeAspect="1"/>
+          </p:cNvGrpSpPr>
+          <p:nvPr userDrawn="1"/>
+        </p:nvGrpSpPr>
+        <p:grpSpPr>
+          <a:xfrm flipV="1">
+            <a:off x="10688509" y="1367191"/>
+            <a:ext cx="1381570" cy="134237"/>
+            <a:chOff x="-4160949" y="6086894"/>
+            <a:chExt cx="9276624" cy="809033"/>
+          </a:xfrm>
+        </p:grpSpPr>
+        <p:grpSp>
+          <p:nvGrpSpPr>
+            <p:cNvPr id="11" name="Group 10">
+              <a:extLst>
+                <a:ext uri="{FF2B5EF4-FFF2-40B4-BE49-F238E27FC236}">
+                  <a16:creationId xmlns:a16="http://schemas.microsoft.com/office/drawing/2014/main" id="{A78679B0-428D-CD45-5D35-3B41B1DCEA83}"/>
+                </a:ext>
+              </a:extLst>
+            </p:cNvPr>
+            <p:cNvGrpSpPr/>
+            <p:nvPr userDrawn="1"/>
+          </p:nvGrpSpPr>
+          <p:grpSpPr>
+            <a:xfrm>
+              <a:off x="0" y="6086894"/>
+              <a:ext cx="5115675" cy="809033"/>
+              <a:chOff x="-1043297" y="6048967"/>
+              <a:chExt cx="5115675" cy="809033"/>
+            </a:xfrm>
+          </p:grpSpPr>
+          <p:grpSp>
+            <p:nvGrpSpPr>
+              <p:cNvPr id="27" name="Group 26">
+                <a:extLst>
+                  <a:ext uri="{FF2B5EF4-FFF2-40B4-BE49-F238E27FC236}">
+                    <a16:creationId xmlns:a16="http://schemas.microsoft.com/office/drawing/2014/main" id="{22A9BAEF-C73C-7B46-F4F8-4BCF3CE3DBB1}"/>
+                  </a:ext>
+                </a:extLst>
+              </p:cNvPr>
+              <p:cNvGrpSpPr/>
+              <p:nvPr userDrawn="1"/>
+            </p:nvGrpSpPr>
+            <p:grpSpPr>
+              <a:xfrm>
+                <a:off x="1110284" y="6048969"/>
+                <a:ext cx="2962094" cy="809031"/>
+                <a:chOff x="-342429" y="5997958"/>
+                <a:chExt cx="2962094" cy="809031"/>
+              </a:xfrm>
+            </p:grpSpPr>
+            <p:grpSp>
+              <p:nvGrpSpPr>
+                <p:cNvPr id="35" name="Group 34">
+                  <a:extLst>
+                    <a:ext uri="{FF2B5EF4-FFF2-40B4-BE49-F238E27FC236}">
+                      <a16:creationId xmlns:a16="http://schemas.microsoft.com/office/drawing/2014/main" id="{596F58DE-D5F0-69BB-6385-5B64C27971F1}"/>
+                    </a:ext>
+                  </a:extLst>
+                </p:cNvPr>
+                <p:cNvGrpSpPr/>
+                <p:nvPr userDrawn="1"/>
+              </p:nvGrpSpPr>
+              <p:grpSpPr>
+                <a:xfrm>
+                  <a:off x="678729" y="5997959"/>
+                  <a:ext cx="1940936" cy="809030"/>
+                  <a:chOff x="678729" y="5997959"/>
+                  <a:chExt cx="1940936" cy="809030"/>
+                </a:xfrm>
+              </p:grpSpPr>
+              <p:pic>
+                <p:nvPicPr>
+                  <p:cNvPr id="39" name="Graphic 38">
+                    <a:extLst>
+                      <a:ext uri="{FF2B5EF4-FFF2-40B4-BE49-F238E27FC236}">
+                        <a16:creationId xmlns:a16="http://schemas.microsoft.com/office/drawing/2014/main" id="{122F5863-D18C-172C-8C31-589017E5B4BF}"/>
+                      </a:ext>
+                    </a:extLst>
+                  </p:cNvPr>
+                  <p:cNvPicPr>
+                    <a:picLocks noChangeAspect="1"/>
+                  </p:cNvPicPr>
+                  <p:nvPr userDrawn="1"/>
+                </p:nvPicPr>
+                <p:blipFill>
+                  <a:blip>
+                    <a:extLst>
+                      <a:ext uri="{96DAC541-7B7A-43D3-8B79-37D633B846F1}">
+                        <asvg:svgBlip xmlns:asvg="http://schemas.microsoft.com/office/drawing/2016/SVG/main" r:embed="rId18"/>
+                      </a:ext>
+                    </a:extLst>
+                  </a:blip>
+                  <a:stretch>
+                    <a:fillRect/>
+                  </a:stretch>
+                </p:blipFill>
+                <p:spPr>
+                  <a:xfrm>
+                    <a:off x="1217929" y="5997959"/>
+                    <a:ext cx="1401736" cy="809029"/>
+                  </a:xfrm>
+                  <a:prstGeom prst="rect">
+                    <a:avLst/>
+                  </a:prstGeom>
+                </p:spPr>
+              </p:pic>
+              <p:pic>
+                <p:nvPicPr>
+                  <p:cNvPr id="40" name="Graphic 39">
+                    <a:extLst>
+                      <a:ext uri="{FF2B5EF4-FFF2-40B4-BE49-F238E27FC236}">
+                        <a16:creationId xmlns:a16="http://schemas.microsoft.com/office/drawing/2014/main" id="{E9243137-4727-247A-2452-817FF6695AAB}"/>
+                      </a:ext>
+                    </a:extLst>
+                  </p:cNvPr>
+                  <p:cNvPicPr>
+                    <a:picLocks noChangeAspect="1"/>
+                  </p:cNvPicPr>
+                  <p:nvPr userDrawn="1"/>
+                </p:nvPicPr>
+                <p:blipFill>
+                  <a:blip>
+                    <a:extLst>
+                      <a:ext uri="{96DAC541-7B7A-43D3-8B79-37D633B846F1}">
+                        <asvg:svgBlip xmlns:asvg="http://schemas.microsoft.com/office/drawing/2016/SVG/main" r:embed="rId19"/>
+                      </a:ext>
+                    </a:extLst>
+                  </a:blip>
+                  <a:stretch>
+                    <a:fillRect/>
+                  </a:stretch>
+                </p:blipFill>
+                <p:spPr>
+                  <a:xfrm>
+                    <a:off x="678729" y="5997960"/>
+                    <a:ext cx="1401736" cy="809029"/>
+                  </a:xfrm>
+                  <a:prstGeom prst="rect">
+                    <a:avLst/>
+                  </a:prstGeom>
+                </p:spPr>
+              </p:pic>
+            </p:grpSp>
+            <p:grpSp>
+              <p:nvGrpSpPr>
+                <p:cNvPr id="36" name="Group 35">
+                  <a:extLst>
+                    <a:ext uri="{FF2B5EF4-FFF2-40B4-BE49-F238E27FC236}">
+                      <a16:creationId xmlns:a16="http://schemas.microsoft.com/office/drawing/2014/main" id="{736D9020-4010-7706-FBBE-EE1232F9784F}"/>
+                    </a:ext>
+                  </a:extLst>
+                </p:cNvPr>
+                <p:cNvGrpSpPr/>
+                <p:nvPr userDrawn="1"/>
+              </p:nvGrpSpPr>
+              <p:grpSpPr>
+                <a:xfrm>
+                  <a:off x="-342429" y="5997958"/>
+                  <a:ext cx="1940936" cy="809030"/>
+                  <a:chOff x="678729" y="5997959"/>
+                  <a:chExt cx="1940936" cy="809030"/>
+                </a:xfrm>
+              </p:grpSpPr>
+              <p:pic>
+                <p:nvPicPr>
+                  <p:cNvPr id="37" name="Graphic 36">
+                    <a:extLst>
+                      <a:ext uri="{FF2B5EF4-FFF2-40B4-BE49-F238E27FC236}">
+                        <a16:creationId xmlns:a16="http://schemas.microsoft.com/office/drawing/2014/main" id="{9199DBD0-44DB-A73E-9094-D4C197799CAF}"/>
+                      </a:ext>
+                    </a:extLst>
+                  </p:cNvPr>
+                  <p:cNvPicPr>
+                    <a:picLocks noChangeAspect="1"/>
+                  </p:cNvPicPr>
+                  <p:nvPr userDrawn="1"/>
+                </p:nvPicPr>
+                <p:blipFill>
+                  <a:blip>
+                    <a:extLst>
+                      <a:ext uri="{96DAC541-7B7A-43D3-8B79-37D633B846F1}">
+                        <asvg:svgBlip xmlns:asvg="http://schemas.microsoft.com/office/drawing/2016/SVG/main" r:embed="rId18"/>
+                      </a:ext>
+                    </a:extLst>
+                  </a:blip>
+                  <a:stretch>
+                    <a:fillRect/>
+                  </a:stretch>
+                </p:blipFill>
+                <p:spPr>
+                  <a:xfrm>
+                    <a:off x="1217929" y="5997959"/>
+                    <a:ext cx="1401736" cy="809029"/>
+                  </a:xfrm>
+                  <a:prstGeom prst="rect">
+                    <a:avLst/>
+                  </a:prstGeom>
+                </p:spPr>
+              </p:pic>
+              <p:pic>
+                <p:nvPicPr>
+                  <p:cNvPr id="38" name="Graphic 37">
+                    <a:extLst>
+                      <a:ext uri="{FF2B5EF4-FFF2-40B4-BE49-F238E27FC236}">
+                        <a16:creationId xmlns:a16="http://schemas.microsoft.com/office/drawing/2014/main" id="{B731F5A9-8659-D87C-644A-DA7737A34AED}"/>
+                      </a:ext>
+                    </a:extLst>
+                  </p:cNvPr>
+                  <p:cNvPicPr>
+                    <a:picLocks noChangeAspect="1"/>
+                  </p:cNvPicPr>
+                  <p:nvPr userDrawn="1"/>
+                </p:nvPicPr>
+                <p:blipFill>
+                  <a:blip>
+                    <a:extLst>
+                      <a:ext uri="{96DAC541-7B7A-43D3-8B79-37D633B846F1}">
+                        <asvg:svgBlip xmlns:asvg="http://schemas.microsoft.com/office/drawing/2016/SVG/main" r:embed="rId19"/>
+                      </a:ext>
+                    </a:extLst>
+                  </a:blip>
+                  <a:stretch>
+                    <a:fillRect/>
+                  </a:stretch>
+                </p:blipFill>
+                <p:spPr>
+                  <a:xfrm>
+                    <a:off x="678729" y="5997960"/>
+                    <a:ext cx="1401736" cy="809029"/>
+                  </a:xfrm>
+                  <a:prstGeom prst="rect">
+                    <a:avLst/>
+                  </a:prstGeom>
+                </p:spPr>
+              </p:pic>
+            </p:grpSp>
+          </p:grpSp>
+          <p:grpSp>
+            <p:nvGrpSpPr>
+              <p:cNvPr id="28" name="Group 27">
+                <a:extLst>
+                  <a:ext uri="{FF2B5EF4-FFF2-40B4-BE49-F238E27FC236}">
+                    <a16:creationId xmlns:a16="http://schemas.microsoft.com/office/drawing/2014/main" id="{75D8F7DA-FF1F-ABB1-00FB-F58CA51820F0}"/>
+                  </a:ext>
+                </a:extLst>
+              </p:cNvPr>
+              <p:cNvGrpSpPr/>
+              <p:nvPr userDrawn="1"/>
+            </p:nvGrpSpPr>
+            <p:grpSpPr>
+              <a:xfrm>
+                <a:off x="-1043297" y="6048967"/>
+                <a:ext cx="2962094" cy="809031"/>
+                <a:chOff x="-342429" y="5997958"/>
+                <a:chExt cx="2962094" cy="809031"/>
+              </a:xfrm>
+            </p:grpSpPr>
+            <p:grpSp>
+              <p:nvGrpSpPr>
+                <p:cNvPr id="29" name="Group 28">
+                  <a:extLst>
+                    <a:ext uri="{FF2B5EF4-FFF2-40B4-BE49-F238E27FC236}">
+                      <a16:creationId xmlns:a16="http://schemas.microsoft.com/office/drawing/2014/main" id="{AF2A06AD-445A-9ACB-FDF4-A44993110185}"/>
+                    </a:ext>
+                  </a:extLst>
+                </p:cNvPr>
+                <p:cNvGrpSpPr/>
+                <p:nvPr userDrawn="1"/>
+              </p:nvGrpSpPr>
+              <p:grpSpPr>
+                <a:xfrm>
+                  <a:off x="678729" y="5997959"/>
+                  <a:ext cx="1940936" cy="809030"/>
+                  <a:chOff x="678729" y="5997959"/>
+                  <a:chExt cx="1940936" cy="809030"/>
+                </a:xfrm>
+              </p:grpSpPr>
+              <p:pic>
+                <p:nvPicPr>
+                  <p:cNvPr id="33" name="Graphic 32">
+                    <a:extLst>
+                      <a:ext uri="{FF2B5EF4-FFF2-40B4-BE49-F238E27FC236}">
+                        <a16:creationId xmlns:a16="http://schemas.microsoft.com/office/drawing/2014/main" id="{CB1E5F81-B757-7ABE-E853-72E7DE165EBF}"/>
+                      </a:ext>
+                    </a:extLst>
+                  </p:cNvPr>
+                  <p:cNvPicPr>
+                    <a:picLocks noChangeAspect="1"/>
+                  </p:cNvPicPr>
+                  <p:nvPr userDrawn="1"/>
+                </p:nvPicPr>
+                <p:blipFill>
+                  <a:blip>
+                    <a:extLst>
+                      <a:ext uri="{96DAC541-7B7A-43D3-8B79-37D633B846F1}">
+                        <asvg:svgBlip xmlns:asvg="http://schemas.microsoft.com/office/drawing/2016/SVG/main" r:embed="rId18"/>
+                      </a:ext>
+                    </a:extLst>
+                  </a:blip>
+                  <a:stretch>
+                    <a:fillRect/>
+                  </a:stretch>
+                </p:blipFill>
+                <p:spPr>
+                  <a:xfrm>
+                    <a:off x="1217929" y="5997959"/>
+                    <a:ext cx="1401736" cy="809029"/>
+                  </a:xfrm>
+                  <a:prstGeom prst="rect">
+                    <a:avLst/>
+                  </a:prstGeom>
+                </p:spPr>
+              </p:pic>
+              <p:pic>
+                <p:nvPicPr>
+                  <p:cNvPr id="34" name="Graphic 33">
+                    <a:extLst>
+                      <a:ext uri="{FF2B5EF4-FFF2-40B4-BE49-F238E27FC236}">
+                        <a16:creationId xmlns:a16="http://schemas.microsoft.com/office/drawing/2014/main" id="{8E5B09A5-F535-137F-3B83-6C93B90AFC58}"/>
+                      </a:ext>
+                    </a:extLst>
+                  </p:cNvPr>
+                  <p:cNvPicPr>
+                    <a:picLocks noChangeAspect="1"/>
+                  </p:cNvPicPr>
+                  <p:nvPr userDrawn="1"/>
+                </p:nvPicPr>
+                <p:blipFill>
+                  <a:blip>
+                    <a:extLst>
+                      <a:ext uri="{96DAC541-7B7A-43D3-8B79-37D633B846F1}">
+                        <asvg:svgBlip xmlns:asvg="http://schemas.microsoft.com/office/drawing/2016/SVG/main" r:embed="rId19"/>
+                      </a:ext>
+                    </a:extLst>
+                  </a:blip>
+                  <a:stretch>
+                    <a:fillRect/>
+                  </a:stretch>
+                </p:blipFill>
+                <p:spPr>
+                  <a:xfrm>
+                    <a:off x="678729" y="5997960"/>
+                    <a:ext cx="1401736" cy="809029"/>
+                  </a:xfrm>
+                  <a:prstGeom prst="rect">
+                    <a:avLst/>
+                  </a:prstGeom>
+                </p:spPr>
+              </p:pic>
+            </p:grpSp>
+            <p:grpSp>
+              <p:nvGrpSpPr>
+                <p:cNvPr id="30" name="Group 29">
+                  <a:extLst>
+                    <a:ext uri="{FF2B5EF4-FFF2-40B4-BE49-F238E27FC236}">
+                      <a16:creationId xmlns:a16="http://schemas.microsoft.com/office/drawing/2014/main" id="{358C355A-F3C6-85FF-87F7-5444155E8D36}"/>
+                    </a:ext>
+                  </a:extLst>
+                </p:cNvPr>
+                <p:cNvGrpSpPr/>
+                <p:nvPr userDrawn="1"/>
+              </p:nvGrpSpPr>
+              <p:grpSpPr>
+                <a:xfrm>
+                  <a:off x="-342429" y="5997958"/>
+                  <a:ext cx="1940936" cy="809030"/>
+                  <a:chOff x="678729" y="5997959"/>
+                  <a:chExt cx="1940936" cy="809030"/>
+                </a:xfrm>
+              </p:grpSpPr>
+              <p:pic>
+                <p:nvPicPr>
+                  <p:cNvPr id="31" name="Graphic 30">
+                    <a:extLst>
+                      <a:ext uri="{FF2B5EF4-FFF2-40B4-BE49-F238E27FC236}">
+                        <a16:creationId xmlns:a16="http://schemas.microsoft.com/office/drawing/2014/main" id="{F0D2C508-5218-70F1-8ACE-4CBA3097EA0D}"/>
+                      </a:ext>
+                    </a:extLst>
+                  </p:cNvPr>
+                  <p:cNvPicPr>
+                    <a:picLocks noChangeAspect="1"/>
+                  </p:cNvPicPr>
+                  <p:nvPr userDrawn="1"/>
+                </p:nvPicPr>
+                <p:blipFill>
+                  <a:blip>
+                    <a:extLst>
+                      <a:ext uri="{96DAC541-7B7A-43D3-8B79-37D633B846F1}">
+                        <asvg:svgBlip xmlns:asvg="http://schemas.microsoft.com/office/drawing/2016/SVG/main" r:embed="rId18"/>
+                      </a:ext>
+                    </a:extLst>
+                  </a:blip>
+                  <a:stretch>
+                    <a:fillRect/>
+                  </a:stretch>
+                </p:blipFill>
+                <p:spPr>
+                  <a:xfrm>
+                    <a:off x="1217929" y="5997959"/>
+                    <a:ext cx="1401736" cy="809029"/>
+                  </a:xfrm>
+                  <a:prstGeom prst="rect">
+                    <a:avLst/>
+                  </a:prstGeom>
+                </p:spPr>
+              </p:pic>
+              <p:pic>
+                <p:nvPicPr>
+                  <p:cNvPr id="32" name="Graphic 31">
+                    <a:extLst>
+                      <a:ext uri="{FF2B5EF4-FFF2-40B4-BE49-F238E27FC236}">
+                        <a16:creationId xmlns:a16="http://schemas.microsoft.com/office/drawing/2014/main" id="{2F292CEA-99CA-C1AD-090E-72118BB26C02}"/>
+                      </a:ext>
+                    </a:extLst>
+                  </p:cNvPr>
+                  <p:cNvPicPr>
+                    <a:picLocks noChangeAspect="1"/>
+                  </p:cNvPicPr>
+                  <p:nvPr userDrawn="1"/>
+                </p:nvPicPr>
+                <p:blipFill>
+                  <a:blip>
+                    <a:extLst>
+                      <a:ext uri="{96DAC541-7B7A-43D3-8B79-37D633B846F1}">
+                        <asvg:svgBlip xmlns:asvg="http://schemas.microsoft.com/office/drawing/2016/SVG/main" r:embed="rId19"/>
+                      </a:ext>
+                    </a:extLst>
+                  </a:blip>
+                  <a:stretch>
+                    <a:fillRect/>
+                  </a:stretch>
+                </p:blipFill>
+                <p:spPr>
+                  <a:xfrm>
+                    <a:off x="678729" y="5997960"/>
+                    <a:ext cx="1401736" cy="809029"/>
+                  </a:xfrm>
+                  <a:prstGeom prst="rect">
+                    <a:avLst/>
+                  </a:prstGeom>
+                </p:spPr>
+              </p:pic>
+            </p:grpSp>
+          </p:grpSp>
+        </p:grpSp>
+        <p:grpSp>
+          <p:nvGrpSpPr>
+            <p:cNvPr id="12" name="Group 11">
+              <a:extLst>
+                <a:ext uri="{FF2B5EF4-FFF2-40B4-BE49-F238E27FC236}">
+                  <a16:creationId xmlns:a16="http://schemas.microsoft.com/office/drawing/2014/main" id="{1D6DDBE2-191B-1F1E-44B6-13AACA6C38ED}"/>
+                </a:ext>
+              </a:extLst>
+            </p:cNvPr>
+            <p:cNvGrpSpPr/>
+            <p:nvPr userDrawn="1"/>
+          </p:nvGrpSpPr>
+          <p:grpSpPr>
+            <a:xfrm>
+              <a:off x="-4160949" y="6086894"/>
+              <a:ext cx="5115675" cy="809033"/>
+              <a:chOff x="-1043297" y="6048967"/>
+              <a:chExt cx="5115675" cy="809033"/>
+            </a:xfrm>
+          </p:grpSpPr>
+          <p:grpSp>
+            <p:nvGrpSpPr>
+              <p:cNvPr id="13" name="Group 12">
+                <a:extLst>
+                  <a:ext uri="{FF2B5EF4-FFF2-40B4-BE49-F238E27FC236}">
+                    <a16:creationId xmlns:a16="http://schemas.microsoft.com/office/drawing/2014/main" id="{B84F940F-FB76-8B0E-F932-6F419390ACBE}"/>
+                  </a:ext>
+                </a:extLst>
+              </p:cNvPr>
+              <p:cNvGrpSpPr/>
+              <p:nvPr userDrawn="1"/>
+            </p:nvGrpSpPr>
+            <p:grpSpPr>
+              <a:xfrm>
+                <a:off x="1110284" y="6048969"/>
+                <a:ext cx="2962094" cy="809031"/>
+                <a:chOff x="-342429" y="5997958"/>
+                <a:chExt cx="2962094" cy="809031"/>
+              </a:xfrm>
+            </p:grpSpPr>
+            <p:grpSp>
+              <p:nvGrpSpPr>
+                <p:cNvPr id="21" name="Group 20">
+                  <a:extLst>
+                    <a:ext uri="{FF2B5EF4-FFF2-40B4-BE49-F238E27FC236}">
+                      <a16:creationId xmlns:a16="http://schemas.microsoft.com/office/drawing/2014/main" id="{8E08E301-9DF4-0D70-5CAF-F8A876290E6F}"/>
+                    </a:ext>
+                  </a:extLst>
+                </p:cNvPr>
+                <p:cNvGrpSpPr/>
+                <p:nvPr userDrawn="1"/>
+              </p:nvGrpSpPr>
+              <p:grpSpPr>
+                <a:xfrm>
+                  <a:off x="678729" y="5997959"/>
+                  <a:ext cx="1940936" cy="809030"/>
+                  <a:chOff x="678729" y="5997959"/>
+                  <a:chExt cx="1940936" cy="809030"/>
+                </a:xfrm>
+              </p:grpSpPr>
+              <p:pic>
+                <p:nvPicPr>
+                  <p:cNvPr id="25" name="Graphic 24">
+                    <a:extLst>
+                      <a:ext uri="{FF2B5EF4-FFF2-40B4-BE49-F238E27FC236}">
+                        <a16:creationId xmlns:a16="http://schemas.microsoft.com/office/drawing/2014/main" id="{DB0505B2-06D5-4134-2786-3F4D641F32EA}"/>
+                      </a:ext>
+                    </a:extLst>
+                  </p:cNvPr>
+                  <p:cNvPicPr>
+                    <a:picLocks noChangeAspect="1"/>
+                  </p:cNvPicPr>
+                  <p:nvPr userDrawn="1"/>
+                </p:nvPicPr>
+                <p:blipFill>
+                  <a:blip>
+                    <a:extLst>
+                      <a:ext uri="{96DAC541-7B7A-43D3-8B79-37D633B846F1}">
+                        <asvg:svgBlip xmlns:asvg="http://schemas.microsoft.com/office/drawing/2016/SVG/main" r:embed="rId18"/>
+                      </a:ext>
+                    </a:extLst>
+                  </a:blip>
+                  <a:stretch>
+                    <a:fillRect/>
+                  </a:stretch>
+                </p:blipFill>
+                <p:spPr>
+                  <a:xfrm>
+                    <a:off x="1217929" y="5997959"/>
+                    <a:ext cx="1401736" cy="809029"/>
+                  </a:xfrm>
+                  <a:prstGeom prst="rect">
+                    <a:avLst/>
+                  </a:prstGeom>
+                </p:spPr>
+              </p:pic>
+              <p:pic>
+                <p:nvPicPr>
+                  <p:cNvPr id="26" name="Graphic 25">
+                    <a:extLst>
+                      <a:ext uri="{FF2B5EF4-FFF2-40B4-BE49-F238E27FC236}">
+                        <a16:creationId xmlns:a16="http://schemas.microsoft.com/office/drawing/2014/main" id="{4367E9A1-0B83-05D2-70FD-BD6A0881F64B}"/>
+                      </a:ext>
+                    </a:extLst>
+                  </p:cNvPr>
+                  <p:cNvPicPr>
+                    <a:picLocks noChangeAspect="1"/>
+                  </p:cNvPicPr>
+                  <p:nvPr userDrawn="1"/>
+                </p:nvPicPr>
+                <p:blipFill>
+                  <a:blip>
+                    <a:extLst>
+                      <a:ext uri="{96DAC541-7B7A-43D3-8B79-37D633B846F1}">
+                        <asvg:svgBlip xmlns:asvg="http://schemas.microsoft.com/office/drawing/2016/SVG/main" r:embed="rId19"/>
+                      </a:ext>
+                    </a:extLst>
+                  </a:blip>
+                  <a:stretch>
+                    <a:fillRect/>
+                  </a:stretch>
+                </p:blipFill>
+                <p:spPr>
+                  <a:xfrm>
+                    <a:off x="678729" y="5997960"/>
+                    <a:ext cx="1401736" cy="809029"/>
+                  </a:xfrm>
+                  <a:prstGeom prst="rect">
+                    <a:avLst/>
+                  </a:prstGeom>
+                </p:spPr>
+              </p:pic>
+            </p:grpSp>
+            <p:grpSp>
+              <p:nvGrpSpPr>
+                <p:cNvPr id="22" name="Group 21">
+                  <a:extLst>
+                    <a:ext uri="{FF2B5EF4-FFF2-40B4-BE49-F238E27FC236}">
+                      <a16:creationId xmlns:a16="http://schemas.microsoft.com/office/drawing/2014/main" id="{5B0B97AF-9BA6-FF76-9816-9FF3ACFAAA30}"/>
+                    </a:ext>
+                  </a:extLst>
+                </p:cNvPr>
+                <p:cNvGrpSpPr/>
+                <p:nvPr userDrawn="1"/>
+              </p:nvGrpSpPr>
+              <p:grpSpPr>
+                <a:xfrm>
+                  <a:off x="-342429" y="5997958"/>
+                  <a:ext cx="1940936" cy="809030"/>
+                  <a:chOff x="678729" y="5997959"/>
+                  <a:chExt cx="1940936" cy="809030"/>
+                </a:xfrm>
+              </p:grpSpPr>
+              <p:pic>
+                <p:nvPicPr>
+                  <p:cNvPr id="23" name="Graphic 22">
+                    <a:extLst>
+                      <a:ext uri="{FF2B5EF4-FFF2-40B4-BE49-F238E27FC236}">
+                        <a16:creationId xmlns:a16="http://schemas.microsoft.com/office/drawing/2014/main" id="{A665F9B9-84DC-0C63-1097-CD78E2139CF1}"/>
+                      </a:ext>
+                    </a:extLst>
+                  </p:cNvPr>
+                  <p:cNvPicPr>
+                    <a:picLocks noChangeAspect="1"/>
+                  </p:cNvPicPr>
+                  <p:nvPr userDrawn="1"/>
+                </p:nvPicPr>
+                <p:blipFill>
+                  <a:blip>
+                    <a:extLst>
+                      <a:ext uri="{96DAC541-7B7A-43D3-8B79-37D633B846F1}">
+                        <asvg:svgBlip xmlns:asvg="http://schemas.microsoft.com/office/drawing/2016/SVG/main" r:embed="rId18"/>
+                      </a:ext>
+                    </a:extLst>
+                  </a:blip>
+                  <a:stretch>
+                    <a:fillRect/>
+                  </a:stretch>
+                </p:blipFill>
+                <p:spPr>
+                  <a:xfrm>
+                    <a:off x="1217929" y="5997959"/>
+                    <a:ext cx="1401736" cy="809029"/>
+                  </a:xfrm>
+                  <a:prstGeom prst="rect">
+                    <a:avLst/>
+                  </a:prstGeom>
+                </p:spPr>
+              </p:pic>
+              <p:pic>
+                <p:nvPicPr>
+                  <p:cNvPr id="24" name="Graphic 23">
+                    <a:extLst>
+                      <a:ext uri="{FF2B5EF4-FFF2-40B4-BE49-F238E27FC236}">
+                        <a16:creationId xmlns:a16="http://schemas.microsoft.com/office/drawing/2014/main" id="{D98D31F3-E34C-898A-ACD2-A1AE75E05331}"/>
+                      </a:ext>
+                    </a:extLst>
+                  </p:cNvPr>
+                  <p:cNvPicPr>
+                    <a:picLocks noChangeAspect="1"/>
+                  </p:cNvPicPr>
+                  <p:nvPr userDrawn="1"/>
+                </p:nvPicPr>
+                <p:blipFill>
+                  <a:blip>
+                    <a:extLst>
+                      <a:ext uri="{96DAC541-7B7A-43D3-8B79-37D633B846F1}">
+                        <asvg:svgBlip xmlns:asvg="http://schemas.microsoft.com/office/drawing/2016/SVG/main" r:embed="rId19"/>
+                      </a:ext>
+                    </a:extLst>
+                  </a:blip>
+                  <a:stretch>
+                    <a:fillRect/>
+                  </a:stretch>
+                </p:blipFill>
+                <p:spPr>
+                  <a:xfrm>
+                    <a:off x="678729" y="5997960"/>
+                    <a:ext cx="1401736" cy="809029"/>
+                  </a:xfrm>
+                  <a:prstGeom prst="rect">
+                    <a:avLst/>
+                  </a:prstGeom>
+                </p:spPr>
+              </p:pic>
+            </p:grpSp>
+          </p:grpSp>
+          <p:grpSp>
+            <p:nvGrpSpPr>
+              <p:cNvPr id="14" name="Group 13">
+                <a:extLst>
+                  <a:ext uri="{FF2B5EF4-FFF2-40B4-BE49-F238E27FC236}">
+                    <a16:creationId xmlns:a16="http://schemas.microsoft.com/office/drawing/2014/main" id="{A4DB8A86-36F5-D2FA-767F-E2592CDF3FB9}"/>
+                  </a:ext>
+                </a:extLst>
+              </p:cNvPr>
+              <p:cNvGrpSpPr/>
+              <p:nvPr userDrawn="1"/>
+            </p:nvGrpSpPr>
+            <p:grpSpPr>
+              <a:xfrm>
+                <a:off x="-1043297" y="6048967"/>
+                <a:ext cx="2962094" cy="809031"/>
+                <a:chOff x="-342429" y="5997958"/>
+                <a:chExt cx="2962094" cy="809031"/>
+              </a:xfrm>
+            </p:grpSpPr>
+            <p:grpSp>
+              <p:nvGrpSpPr>
+                <p:cNvPr id="15" name="Group 14">
+                  <a:extLst>
+                    <a:ext uri="{FF2B5EF4-FFF2-40B4-BE49-F238E27FC236}">
+                      <a16:creationId xmlns:a16="http://schemas.microsoft.com/office/drawing/2014/main" id="{0970D390-BC94-1D52-F305-C21407ADDCEF}"/>
+                    </a:ext>
+                  </a:extLst>
+                </p:cNvPr>
+                <p:cNvGrpSpPr/>
+                <p:nvPr userDrawn="1"/>
+              </p:nvGrpSpPr>
+              <p:grpSpPr>
+                <a:xfrm>
+                  <a:off x="678729" y="5997959"/>
+                  <a:ext cx="1940936" cy="809030"/>
+                  <a:chOff x="678729" y="5997959"/>
+                  <a:chExt cx="1940936" cy="809030"/>
+                </a:xfrm>
+              </p:grpSpPr>
+              <p:pic>
+                <p:nvPicPr>
+                  <p:cNvPr id="19" name="Graphic 18">
+                    <a:extLst>
+                      <a:ext uri="{FF2B5EF4-FFF2-40B4-BE49-F238E27FC236}">
+                        <a16:creationId xmlns:a16="http://schemas.microsoft.com/office/drawing/2014/main" id="{105CCD5E-9856-E84C-1D32-FED17729B8C4}"/>
+                      </a:ext>
+                    </a:extLst>
+                  </p:cNvPr>
+                  <p:cNvPicPr>
+                    <a:picLocks noChangeAspect="1"/>
+                  </p:cNvPicPr>
+                  <p:nvPr userDrawn="1"/>
+                </p:nvPicPr>
+                <p:blipFill>
+                  <a:blip>
+                    <a:extLst>
+                      <a:ext uri="{96DAC541-7B7A-43D3-8B79-37D633B846F1}">
+                        <asvg:svgBlip xmlns:asvg="http://schemas.microsoft.com/office/drawing/2016/SVG/main" r:embed="rId18"/>
+                      </a:ext>
+                    </a:extLst>
+                  </a:blip>
+                  <a:stretch>
+                    <a:fillRect/>
+                  </a:stretch>
+                </p:blipFill>
+                <p:spPr>
+                  <a:xfrm>
+                    <a:off x="1217929" y="5997959"/>
+                    <a:ext cx="1401736" cy="809029"/>
+                  </a:xfrm>
+                  <a:prstGeom prst="rect">
+                    <a:avLst/>
+                  </a:prstGeom>
+                </p:spPr>
+              </p:pic>
+              <p:pic>
+                <p:nvPicPr>
+                  <p:cNvPr id="20" name="Graphic 19">
+                    <a:extLst>
+                      <a:ext uri="{FF2B5EF4-FFF2-40B4-BE49-F238E27FC236}">
+                        <a16:creationId xmlns:a16="http://schemas.microsoft.com/office/drawing/2014/main" id="{7AEDCBF1-264C-65AF-5B01-113F6F5984DB}"/>
+                      </a:ext>
+                    </a:extLst>
+                  </p:cNvPr>
+                  <p:cNvPicPr>
+                    <a:picLocks noChangeAspect="1"/>
+                  </p:cNvPicPr>
+                  <p:nvPr userDrawn="1"/>
+                </p:nvPicPr>
+                <p:blipFill>
+                  <a:blip>
+                    <a:extLst>
+                      <a:ext uri="{96DAC541-7B7A-43D3-8B79-37D633B846F1}">
+                        <asvg:svgBlip xmlns:asvg="http://schemas.microsoft.com/office/drawing/2016/SVG/main" r:embed="rId19"/>
+                      </a:ext>
+                    </a:extLst>
+                  </a:blip>
+                  <a:stretch>
+                    <a:fillRect/>
+                  </a:stretch>
+                </p:blipFill>
+                <p:spPr>
+                  <a:xfrm>
+                    <a:off x="678729" y="5997960"/>
+                    <a:ext cx="1401736" cy="809029"/>
+                  </a:xfrm>
+                  <a:prstGeom prst="rect">
+                    <a:avLst/>
+                  </a:prstGeom>
+                </p:spPr>
+              </p:pic>
+            </p:grpSp>
+            <p:grpSp>
+              <p:nvGrpSpPr>
+                <p:cNvPr id="16" name="Group 15">
+                  <a:extLst>
+                    <a:ext uri="{FF2B5EF4-FFF2-40B4-BE49-F238E27FC236}">
+                      <a16:creationId xmlns:a16="http://schemas.microsoft.com/office/drawing/2014/main" id="{C2D2AE26-56BA-4847-6E39-418531BFD823}"/>
+                    </a:ext>
+                  </a:extLst>
+                </p:cNvPr>
+                <p:cNvGrpSpPr/>
+                <p:nvPr userDrawn="1"/>
+              </p:nvGrpSpPr>
+              <p:grpSpPr>
+                <a:xfrm>
+                  <a:off x="-342429" y="5997958"/>
+                  <a:ext cx="1940936" cy="809030"/>
+                  <a:chOff x="678729" y="5997959"/>
+                  <a:chExt cx="1940936" cy="809030"/>
+                </a:xfrm>
+              </p:grpSpPr>
+              <p:pic>
+                <p:nvPicPr>
+                  <p:cNvPr id="17" name="Graphic 16">
+                    <a:extLst>
+                      <a:ext uri="{FF2B5EF4-FFF2-40B4-BE49-F238E27FC236}">
+                        <a16:creationId xmlns:a16="http://schemas.microsoft.com/office/drawing/2014/main" id="{4A9052B7-D265-CA2C-187F-2D90FA7A25E7}"/>
+                      </a:ext>
+                    </a:extLst>
+                  </p:cNvPr>
+                  <p:cNvPicPr>
+                    <a:picLocks noChangeAspect="1"/>
+                  </p:cNvPicPr>
+                  <p:nvPr userDrawn="1"/>
+                </p:nvPicPr>
+                <p:blipFill>
+                  <a:blip>
+                    <a:extLst>
+                      <a:ext uri="{96DAC541-7B7A-43D3-8B79-37D633B846F1}">
+                        <asvg:svgBlip xmlns:asvg="http://schemas.microsoft.com/office/drawing/2016/SVG/main" r:embed="rId18"/>
+                      </a:ext>
+                    </a:extLst>
+                  </a:blip>
+                  <a:stretch>
+                    <a:fillRect/>
+                  </a:stretch>
+                </p:blipFill>
+                <p:spPr>
+                  <a:xfrm>
+                    <a:off x="1217929" y="5997959"/>
+                    <a:ext cx="1401736" cy="809029"/>
+                  </a:xfrm>
+                  <a:prstGeom prst="rect">
+                    <a:avLst/>
+                  </a:prstGeom>
+                </p:spPr>
+              </p:pic>
+              <p:pic>
+                <p:nvPicPr>
+                  <p:cNvPr id="18" name="Graphic 17">
+                    <a:extLst>
+                      <a:ext uri="{FF2B5EF4-FFF2-40B4-BE49-F238E27FC236}">
+                        <a16:creationId xmlns:a16="http://schemas.microsoft.com/office/drawing/2014/main" id="{EF1AF235-A3B6-D6AE-799F-CC33AA4252C0}"/>
+                      </a:ext>
+                    </a:extLst>
+                  </p:cNvPr>
+                  <p:cNvPicPr>
+                    <a:picLocks noChangeAspect="1"/>
+                  </p:cNvPicPr>
+                  <p:nvPr userDrawn="1"/>
+                </p:nvPicPr>
+                <p:blipFill>
+                  <a:blip>
+                    <a:extLst>
+                      <a:ext uri="{96DAC541-7B7A-43D3-8B79-37D633B846F1}">
+                        <asvg:svgBlip xmlns:asvg="http://schemas.microsoft.com/office/drawing/2016/SVG/main" r:embed="rId19"/>
+                      </a:ext>
+                    </a:extLst>
+                  </a:blip>
+                  <a:stretch>
+                    <a:fillRect/>
+                  </a:stretch>
+                </p:blipFill>
+                <p:spPr>
+                  <a:xfrm>
+                    <a:off x="678729" y="5997960"/>
+                    <a:ext cx="1401736" cy="809029"/>
+                  </a:xfrm>
+                  <a:prstGeom prst="rect">
+                    <a:avLst/>
+                  </a:prstGeom>
+                </p:spPr>
+              </p:pic>
+            </p:grpSp>
+          </p:grpSp>
+        </p:grpSp>
+      </p:grpSp>
     </p:spTree>
     <p:extLst>
       <p:ext uri="{BB962C8B-B14F-4D97-AF65-F5344CB8AC3E}">
